--- a/docs/Aethera-Presentation.pptx
+++ b/docs/Aethera-Presentation.pptx
@@ -22,10 +22,11 @@
     <p:embeddedFont>
       <p:font typeface="Open Sans" panose="020B0606030504020204" pitchFamily="34" charset="0"/>
       <p:regular r:id="rId9"/>
+      <p:bold r:id="rId10"/>
     </p:embeddedFont>
     <p:embeddedFont>
       <p:font typeface="Quicksand" panose="020B0604020202020204" charset="0"/>
-      <p:regular r:id="rId10"/>
+      <p:regular r:id="rId11"/>
     </p:embeddedFont>
   </p:embeddedFontLst>
   <p:defaultTextStyle>
@@ -3513,13 +3514,13 @@
   <p:clrMapOvr>
     <a:masterClrMapping/>
   </p:clrMapOvr>
-  <mc:AlternateContent xmlns:mc="http://schemas.openxmlformats.org/markup-compatibility/2006">
-    <mc:Choice xmlns:p159="http://schemas.microsoft.com/office/powerpoint/2015/09/main" Requires="p159">
+  <mc:AlternateContent xmlns:mc="http://schemas.openxmlformats.org/markup-compatibility/2006" xmlns:p159="http://schemas.microsoft.com/office/powerpoint/2015/09/main">
+    <mc:Choice Requires="p159">
       <p:transition xmlns:p14="http://schemas.microsoft.com/office/powerpoint/2010/main" spd="slow" p14:dur="2000">
         <p159:morph option="byObject"/>
       </p:transition>
     </mc:Choice>
-    <mc:Fallback>
+    <mc:Fallback xmlns="">
       <p:transition spd="slow">
         <p:fade/>
       </p:transition>
@@ -4045,13 +4046,13 @@
   <p:clrMapOvr>
     <a:masterClrMapping/>
   </p:clrMapOvr>
-  <mc:AlternateContent xmlns:mc="http://schemas.openxmlformats.org/markup-compatibility/2006">
-    <mc:Choice xmlns:p159="http://schemas.microsoft.com/office/powerpoint/2015/09/main" Requires="p159">
+  <mc:AlternateContent xmlns:mc="http://schemas.openxmlformats.org/markup-compatibility/2006" xmlns:p159="http://schemas.microsoft.com/office/powerpoint/2015/09/main">
+    <mc:Choice Requires="p159">
       <p:transition xmlns:p14="http://schemas.microsoft.com/office/powerpoint/2010/main" spd="slow" p14:dur="2000">
         <p159:morph option="byObject"/>
       </p:transition>
     </mc:Choice>
-    <mc:Fallback>
+    <mc:Fallback xmlns="">
       <p:transition spd="slow">
         <p:fade/>
       </p:transition>
@@ -5764,13 +5765,13 @@
   <p:clrMapOvr>
     <a:masterClrMapping/>
   </p:clrMapOvr>
-  <mc:AlternateContent xmlns:mc="http://schemas.openxmlformats.org/markup-compatibility/2006">
-    <mc:Choice xmlns:p159="http://schemas.microsoft.com/office/powerpoint/2015/09/main" Requires="p159">
+  <mc:AlternateContent xmlns:mc="http://schemas.openxmlformats.org/markup-compatibility/2006" xmlns:p159="http://schemas.microsoft.com/office/powerpoint/2015/09/main">
+    <mc:Choice Requires="p159">
       <p:transition xmlns:p14="http://schemas.microsoft.com/office/powerpoint/2010/main" spd="slow" p14:dur="2000">
         <p159:morph option="byObject"/>
       </p:transition>
     </mc:Choice>
-    <mc:Fallback>
+    <mc:Fallback xmlns="">
       <p:transition spd="slow">
         <p:fade/>
       </p:transition>
@@ -6203,7 +6204,7 @@
               </a:spcBef>
             </a:pPr>
             <a:r>
-              <a:rPr lang="en-US" sz="3793">
+              <a:rPr lang="en-US" sz="3793" dirty="0" err="1">
                 <a:solidFill>
                   <a:srgbClr val="000000"/>
                 </a:solidFill>
@@ -6212,7 +6213,19 @@
                 <a:cs typeface="Open Sans"/>
                 <a:sym typeface="Open Sans"/>
               </a:rPr>
-              <a:t>Aethera was built to give students a fast and focused way to prepare for exams. We wanted learning to feel rewarding, not exhausting — so we built a fully graphical desktop application using Qt. Our platform lets you test your knowledge, track your progress, and study with flashcards.</a:t>
+              <a:t>Aethera</a:t>
+            </a:r>
+            <a:r>
+              <a:rPr lang="en-US" sz="3793" dirty="0">
+                <a:solidFill>
+                  <a:srgbClr val="000000"/>
+                </a:solidFill>
+                <a:latin typeface="Open Sans"/>
+                <a:ea typeface="Open Sans"/>
+                <a:cs typeface="Open Sans"/>
+                <a:sym typeface="Open Sans"/>
+              </a:rPr>
+              <a:t> was built to give students a fast and focused way to prepare for exams. We wanted learning to feel rewarding, not exhausting - so we built a fully graphical desktop application using Qt. Our platform lets you test your knowledge, track your progress, and study with flashcards.</a:t>
             </a:r>
           </a:p>
         </p:txBody>
@@ -6222,13 +6235,13 @@
   <p:clrMapOvr>
     <a:masterClrMapping/>
   </p:clrMapOvr>
-  <mc:AlternateContent xmlns:mc="http://schemas.openxmlformats.org/markup-compatibility/2006">
-    <mc:Choice xmlns:p159="http://schemas.microsoft.com/office/powerpoint/2015/09/main" Requires="p159">
+  <mc:AlternateContent xmlns:mc="http://schemas.openxmlformats.org/markup-compatibility/2006" xmlns:p159="http://schemas.microsoft.com/office/powerpoint/2015/09/main">
+    <mc:Choice Requires="p159">
       <p:transition xmlns:p14="http://schemas.microsoft.com/office/powerpoint/2010/main" spd="slow" p14:dur="2000">
         <p159:morph option="byObject"/>
       </p:transition>
     </mc:Choice>
-    <mc:Fallback>
+    <mc:Fallback xmlns="">
       <p:transition spd="slow">
         <p:fade/>
       </p:transition>
@@ -6456,7 +6469,7 @@
                 <a:cs typeface="Bebas Neue Cyrillic"/>
                 <a:sym typeface="Bebas Neue Cyrillic"/>
               </a:rPr>
-              <a:t>used Technologies</a:t>
+              <a:t>Tech stack</a:t>
             </a:r>
           </a:p>
         </p:txBody>
@@ -7333,13 +7346,13 @@
   <p:clrMapOvr>
     <a:masterClrMapping/>
   </p:clrMapOvr>
-  <mc:AlternateContent xmlns:mc="http://schemas.openxmlformats.org/markup-compatibility/2006">
-    <mc:Choice xmlns:p159="http://schemas.microsoft.com/office/powerpoint/2015/09/main" Requires="p159">
+  <mc:AlternateContent xmlns:mc="http://schemas.openxmlformats.org/markup-compatibility/2006" xmlns:p159="http://schemas.microsoft.com/office/powerpoint/2015/09/main">
+    <mc:Choice Requires="p159">
       <p:transition xmlns:p14="http://schemas.microsoft.com/office/powerpoint/2010/main" spd="slow" p14:dur="2000">
         <p159:morph option="byObject"/>
       </p:transition>
     </mc:Choice>
-    <mc:Fallback>
+    <mc:Fallback xmlns="">
       <p:transition spd="slow">
         <p:fade/>
       </p:transition>
@@ -7687,13 +7700,13 @@
   <p:clrMapOvr>
     <a:masterClrMapping/>
   </p:clrMapOvr>
-  <mc:AlternateContent xmlns:mc="http://schemas.openxmlformats.org/markup-compatibility/2006">
-    <mc:Choice xmlns:p159="http://schemas.microsoft.com/office/powerpoint/2015/09/main" Requires="p159">
+  <mc:AlternateContent xmlns:mc="http://schemas.openxmlformats.org/markup-compatibility/2006" xmlns:p159="http://schemas.microsoft.com/office/powerpoint/2015/09/main">
+    <mc:Choice Requires="p159">
       <p:transition xmlns:p14="http://schemas.microsoft.com/office/powerpoint/2010/main" spd="slow" p14:dur="2000">
         <p159:morph option="byObject"/>
       </p:transition>
     </mc:Choice>
-    <mc:Fallback>
+    <mc:Fallback xmlns="">
       <p:transition spd="slow">
         <p:fade/>
       </p:transition>
